--- a/notes/week11/LinearSearch.pptx
+++ b/notes/week11/LinearSearch.pptx
@@ -162,7 +162,7 @@
 <file path=ppt/revisionInfo.xml><?xml version="1.0" encoding="utf-8"?>
 <p1510:revInfo xmlns:a="http://schemas.openxmlformats.org/drawingml/2006/main" xmlns:r="http://schemas.openxmlformats.org/officeDocument/2006/relationships" xmlns:p1510="http://schemas.microsoft.com/office/powerpoint/2015/10/main">
   <p1510:revLst>
-    <p1510:client id="{48D3FA55-28A5-0641-A87D-6553D318B4FC}" v="2" dt="2026-03-16T19:52:04.057"/>
+    <p1510:client id="{48D3FA55-28A5-0641-A87D-6553D318B4FC}" v="3" dt="2026-03-16T20:44:50.871"/>
     <p1510:client id="{AF5A2C89-C11A-1E4E-AB5E-7373A28A7B37}" v="33" dt="2026-03-15T23:33:14.237"/>
   </p1510:revLst>
 </p1510:revInfo>
@@ -173,7 +173,7 @@
   <pc:docChgLst>
     <pc:chgData name="Toby Donaldson" userId="2e6e5431-bb17-4c41-9985-d39c50d83c73" providerId="ADAL" clId="{F31BC264-820E-54C4-A6D1-F92AF9CC222E}"/>
     <pc:docChg chg="undo custSel addSld modSld sldOrd">
-      <pc:chgData name="Toby Donaldson" userId="2e6e5431-bb17-4c41-9985-d39c50d83c73" providerId="ADAL" clId="{F31BC264-820E-54C4-A6D1-F92AF9CC222E}" dt="2026-03-16T19:52:04.054" v="234"/>
+      <pc:chgData name="Toby Donaldson" userId="2e6e5431-bb17-4c41-9985-d39c50d83c73" providerId="ADAL" clId="{F31BC264-820E-54C4-A6D1-F92AF9CC222E}" dt="2026-03-16T20:44:54.170" v="237" actId="20577"/>
       <pc:docMkLst>
         <pc:docMk/>
       </pc:docMkLst>
@@ -303,6 +303,21 @@
           </ac:inkMkLst>
         </pc:inkChg>
       </pc:sldChg>
+      <pc:sldChg chg="addSp">
+        <pc:chgData name="Toby Donaldson" userId="2e6e5431-bb17-4c41-9985-d39c50d83c73" providerId="ADAL" clId="{F31BC264-820E-54C4-A6D1-F92AF9CC222E}" dt="2026-03-16T20:44:50.868" v="235"/>
+        <pc:sldMkLst>
+          <pc:docMk/>
+          <pc:sldMk cId="0" sldId="260"/>
+        </pc:sldMkLst>
+        <pc:inkChg chg="add">
+          <ac:chgData name="Toby Donaldson" userId="2e6e5431-bb17-4c41-9985-d39c50d83c73" providerId="ADAL" clId="{F31BC264-820E-54C4-A6D1-F92AF9CC222E}" dt="2026-03-16T20:44:50.868" v="235"/>
+          <ac:inkMkLst>
+            <pc:docMk/>
+            <pc:sldMk cId="0" sldId="260"/>
+            <ac:inkMk id="11" creationId="{A5373A29-833A-76A7-E655-FBE89D3AAED8}"/>
+          </ac:inkMkLst>
+        </pc:inkChg>
+      </pc:sldChg>
       <pc:sldChg chg="modSp mod ord">
         <pc:chgData name="Toby Donaldson" userId="2e6e5431-bb17-4c41-9985-d39c50d83c73" providerId="ADAL" clId="{F31BC264-820E-54C4-A6D1-F92AF9CC222E}" dt="2026-03-16T18:22:47.449" v="209" actId="20577"/>
         <pc:sldMkLst>
@@ -349,6 +364,36 @@
         </pc:sldMkLst>
       </pc:sldChg>
       <pc:sldChg chg="addSp">
+        <pc:chgData name="Toby Donaldson" userId="2e6e5431-bb17-4c41-9985-d39c50d83c73" providerId="ADAL" clId="{F31BC264-820E-54C4-A6D1-F92AF9CC222E}" dt="2026-03-16T20:44:50.868" v="235"/>
+        <pc:sldMkLst>
+          <pc:docMk/>
+          <pc:sldMk cId="0" sldId="266"/>
+        </pc:sldMkLst>
+        <pc:inkChg chg="add">
+          <ac:chgData name="Toby Donaldson" userId="2e6e5431-bb17-4c41-9985-d39c50d83c73" providerId="ADAL" clId="{F31BC264-820E-54C4-A6D1-F92AF9CC222E}" dt="2026-03-16T20:44:50.868" v="235"/>
+          <ac:inkMkLst>
+            <pc:docMk/>
+            <pc:sldMk cId="0" sldId="266"/>
+            <ac:inkMk id="8" creationId="{0C6BB417-5F54-BB94-4647-99258EA55782}"/>
+          </ac:inkMkLst>
+        </pc:inkChg>
+      </pc:sldChg>
+      <pc:sldChg chg="addSp">
+        <pc:chgData name="Toby Donaldson" userId="2e6e5431-bb17-4c41-9985-d39c50d83c73" providerId="ADAL" clId="{F31BC264-820E-54C4-A6D1-F92AF9CC222E}" dt="2026-03-16T20:44:50.868" v="235"/>
+        <pc:sldMkLst>
+          <pc:docMk/>
+          <pc:sldMk cId="0" sldId="267"/>
+        </pc:sldMkLst>
+        <pc:inkChg chg="add">
+          <ac:chgData name="Toby Donaldson" userId="2e6e5431-bb17-4c41-9985-d39c50d83c73" providerId="ADAL" clId="{F31BC264-820E-54C4-A6D1-F92AF9CC222E}" dt="2026-03-16T20:44:50.868" v="235"/>
+          <ac:inkMkLst>
+            <pc:docMk/>
+            <pc:sldMk cId="0" sldId="267"/>
+            <ac:inkMk id="9" creationId="{FE68BED0-E6D1-4877-BA95-401FD50FDD53}"/>
+          </ac:inkMkLst>
+        </pc:inkChg>
+      </pc:sldChg>
+      <pc:sldChg chg="addSp">
         <pc:chgData name="Toby Donaldson" userId="2e6e5431-bb17-4c41-9985-d39c50d83c73" providerId="ADAL" clId="{F31BC264-820E-54C4-A6D1-F92AF9CC222E}" dt="2026-03-16T19:52:04.054" v="234"/>
         <pc:sldMkLst>
           <pc:docMk/>
@@ -360,6 +405,119 @@
             <pc:docMk/>
             <pc:sldMk cId="3637366666" sldId="277"/>
             <ac:inkMk id="7" creationId="{9D4CCAD8-3D7F-77C7-7EA5-48A469295D40}"/>
+          </ac:inkMkLst>
+        </pc:inkChg>
+      </pc:sldChg>
+      <pc:sldChg chg="addSp">
+        <pc:chgData name="Toby Donaldson" userId="2e6e5431-bb17-4c41-9985-d39c50d83c73" providerId="ADAL" clId="{F31BC264-820E-54C4-A6D1-F92AF9CC222E}" dt="2026-03-16T20:44:50.868" v="235"/>
+        <pc:sldMkLst>
+          <pc:docMk/>
+          <pc:sldMk cId="1694673851" sldId="280"/>
+        </pc:sldMkLst>
+        <pc:inkChg chg="add">
+          <ac:chgData name="Toby Donaldson" userId="2e6e5431-bb17-4c41-9985-d39c50d83c73" providerId="ADAL" clId="{F31BC264-820E-54C4-A6D1-F92AF9CC222E}" dt="2026-03-16T20:44:50.868" v="235"/>
+          <ac:inkMkLst>
+            <pc:docMk/>
+            <pc:sldMk cId="1694673851" sldId="280"/>
+            <ac:inkMk id="9" creationId="{F6E23D20-ECB1-2128-49A5-833F5122B14F}"/>
+          </ac:inkMkLst>
+        </pc:inkChg>
+      </pc:sldChg>
+      <pc:sldChg chg="addSp">
+        <pc:chgData name="Toby Donaldson" userId="2e6e5431-bb17-4c41-9985-d39c50d83c73" providerId="ADAL" clId="{F31BC264-820E-54C4-A6D1-F92AF9CC222E}" dt="2026-03-16T20:44:50.868" v="235"/>
+        <pc:sldMkLst>
+          <pc:docMk/>
+          <pc:sldMk cId="3553950885" sldId="281"/>
+        </pc:sldMkLst>
+        <pc:inkChg chg="add">
+          <ac:chgData name="Toby Donaldson" userId="2e6e5431-bb17-4c41-9985-d39c50d83c73" providerId="ADAL" clId="{F31BC264-820E-54C4-A6D1-F92AF9CC222E}" dt="2026-03-16T20:44:50.868" v="235"/>
+          <ac:inkMkLst>
+            <pc:docMk/>
+            <pc:sldMk cId="3553950885" sldId="281"/>
+            <ac:inkMk id="9" creationId="{C856A445-2227-D217-9C1A-2D97DDDFF05A}"/>
+          </ac:inkMkLst>
+        </pc:inkChg>
+      </pc:sldChg>
+      <pc:sldChg chg="addSp">
+        <pc:chgData name="Toby Donaldson" userId="2e6e5431-bb17-4c41-9985-d39c50d83c73" providerId="ADAL" clId="{F31BC264-820E-54C4-A6D1-F92AF9CC222E}" dt="2026-03-16T20:44:50.868" v="235"/>
+        <pc:sldMkLst>
+          <pc:docMk/>
+          <pc:sldMk cId="1321137473" sldId="282"/>
+        </pc:sldMkLst>
+        <pc:inkChg chg="add">
+          <ac:chgData name="Toby Donaldson" userId="2e6e5431-bb17-4c41-9985-d39c50d83c73" providerId="ADAL" clId="{F31BC264-820E-54C4-A6D1-F92AF9CC222E}" dt="2026-03-16T20:44:50.868" v="235"/>
+          <ac:inkMkLst>
+            <pc:docMk/>
+            <pc:sldMk cId="1321137473" sldId="282"/>
+            <ac:inkMk id="9" creationId="{6A8326B1-5B8F-3BA2-58EF-CEA1DAB9A61B}"/>
+          </ac:inkMkLst>
+        </pc:inkChg>
+      </pc:sldChg>
+      <pc:sldChg chg="addSp">
+        <pc:chgData name="Toby Donaldson" userId="2e6e5431-bb17-4c41-9985-d39c50d83c73" providerId="ADAL" clId="{F31BC264-820E-54C4-A6D1-F92AF9CC222E}" dt="2026-03-16T20:44:50.868" v="235"/>
+        <pc:sldMkLst>
+          <pc:docMk/>
+          <pc:sldMk cId="3905298099" sldId="287"/>
+        </pc:sldMkLst>
+        <pc:inkChg chg="add">
+          <ac:chgData name="Toby Donaldson" userId="2e6e5431-bb17-4c41-9985-d39c50d83c73" providerId="ADAL" clId="{F31BC264-820E-54C4-A6D1-F92AF9CC222E}" dt="2026-03-16T20:44:50.868" v="235"/>
+          <ac:inkMkLst>
+            <pc:docMk/>
+            <pc:sldMk cId="3905298099" sldId="287"/>
+            <ac:inkMk id="9" creationId="{BB68B7B7-4105-B91D-BEA7-B242F11B39E9}"/>
+          </ac:inkMkLst>
+        </pc:inkChg>
+      </pc:sldChg>
+      <pc:sldChg chg="addSp">
+        <pc:chgData name="Toby Donaldson" userId="2e6e5431-bb17-4c41-9985-d39c50d83c73" providerId="ADAL" clId="{F31BC264-820E-54C4-A6D1-F92AF9CC222E}" dt="2026-03-16T20:44:50.868" v="235"/>
+        <pc:sldMkLst>
+          <pc:docMk/>
+          <pc:sldMk cId="714089623" sldId="289"/>
+        </pc:sldMkLst>
+        <pc:inkChg chg="add">
+          <ac:chgData name="Toby Donaldson" userId="2e6e5431-bb17-4c41-9985-d39c50d83c73" providerId="ADAL" clId="{F31BC264-820E-54C4-A6D1-F92AF9CC222E}" dt="2026-03-16T20:44:50.868" v="235"/>
+          <ac:inkMkLst>
+            <pc:docMk/>
+            <pc:sldMk cId="714089623" sldId="289"/>
+            <ac:inkMk id="9" creationId="{8FC38E98-D14D-6B04-2CE0-2C245D9D3A0A}"/>
+          </ac:inkMkLst>
+        </pc:inkChg>
+      </pc:sldChg>
+      <pc:sldChg chg="addSp">
+        <pc:chgData name="Toby Donaldson" userId="2e6e5431-bb17-4c41-9985-d39c50d83c73" providerId="ADAL" clId="{F31BC264-820E-54C4-A6D1-F92AF9CC222E}" dt="2026-03-16T20:44:50.868" v="235"/>
+        <pc:sldMkLst>
+          <pc:docMk/>
+          <pc:sldMk cId="2216189954" sldId="292"/>
+        </pc:sldMkLst>
+        <pc:inkChg chg="add">
+          <ac:chgData name="Toby Donaldson" userId="2e6e5431-bb17-4c41-9985-d39c50d83c73" providerId="ADAL" clId="{F31BC264-820E-54C4-A6D1-F92AF9CC222E}" dt="2026-03-16T20:44:50.868" v="235"/>
+          <ac:inkMkLst>
+            <pc:docMk/>
+            <pc:sldMk cId="2216189954" sldId="292"/>
+            <ac:inkMk id="9" creationId="{2DCDDDCE-FADF-5FCD-B74E-A46C5BFBFC91}"/>
+          </ac:inkMkLst>
+        </pc:inkChg>
+      </pc:sldChg>
+      <pc:sldChg chg="addSp modSp mod">
+        <pc:chgData name="Toby Donaldson" userId="2e6e5431-bb17-4c41-9985-d39c50d83c73" providerId="ADAL" clId="{F31BC264-820E-54C4-A6D1-F92AF9CC222E}" dt="2026-03-16T20:44:54.170" v="237" actId="20577"/>
+        <pc:sldMkLst>
+          <pc:docMk/>
+          <pc:sldMk cId="3049124529" sldId="293"/>
+        </pc:sldMkLst>
+        <pc:spChg chg="mod">
+          <ac:chgData name="Toby Donaldson" userId="2e6e5431-bb17-4c41-9985-d39c50d83c73" providerId="ADAL" clId="{F31BC264-820E-54C4-A6D1-F92AF9CC222E}" dt="2026-03-16T20:44:54.170" v="237" actId="20577"/>
+          <ac:spMkLst>
+            <pc:docMk/>
+            <pc:sldMk cId="3049124529" sldId="293"/>
+            <ac:spMk id="61" creationId="{5AA86E0B-BC81-997F-3C08-52D4643DF2EE}"/>
+          </ac:spMkLst>
+        </pc:spChg>
+        <pc:inkChg chg="add">
+          <ac:chgData name="Toby Donaldson" userId="2e6e5431-bb17-4c41-9985-d39c50d83c73" providerId="ADAL" clId="{F31BC264-820E-54C4-A6D1-F92AF9CC222E}" dt="2026-03-16T20:44:50.868" v="235"/>
+          <ac:inkMkLst>
+            <pc:docMk/>
+            <pc:sldMk cId="3049124529" sldId="293"/>
+            <ac:inkMk id="9" creationId="{985AC7F8-7969-D1B8-1E81-EF25063C0B3C}"/>
           </ac:inkMkLst>
         </pc:inkChg>
       </pc:sldChg>
@@ -777,6 +935,178 @@
 </inkml:ink>
 </file>
 
+<file path=ppt/ink/ink10.xml><?xml version="1.0" encoding="utf-8"?>
+<inkml:ink xmlns:inkml="http://www.w3.org/2003/InkML">
+  <inkml:definitions>
+    <inkml:context xml:id="ctx0">
+      <inkml:inkSource xml:id="inkSrc0">
+        <inkml:traceFormat>
+          <inkml:channel name="X" type="integer" min="-2.14748E9" max="2.14748E9" units="cm"/>
+          <inkml:channel name="Y" type="integer" min="-2.14748E9" max="2.14748E9" units="cm"/>
+          <inkml:channel name="F" type="integer" max="32767" units="dev"/>
+        </inkml:traceFormat>
+        <inkml:channelProperties>
+          <inkml:channelProperty channel="X" name="resolution" value="1000" units="1/cm"/>
+          <inkml:channelProperty channel="Y" name="resolution" value="1000" units="1/cm"/>
+          <inkml:channelProperty channel="F" name="resolution" value="0" units="1/dev"/>
+        </inkml:channelProperties>
+      </inkml:inkSource>
+      <inkml:timestamp xml:id="ts0" timeString="2026-03-16T20:39:53.447"/>
+    </inkml:context>
+    <inkml:brush xml:id="br0">
+      <inkml:brushProperty name="width" value="0.05292" units="cm"/>
+      <inkml:brushProperty name="height" value="0.05292" units="cm"/>
+      <inkml:brushProperty name="color" value="#FF0000"/>
+    </inkml:brush>
+  </inkml:definitions>
+  <inkml:trace contextRef="#ctx0" brushRef="#br0">5384 3744 24575,'15'0'0,"14"0"0,-12 0 0,15 0 0,0 0 0,-4 0 0,4 0 0,1 0 0,-5 0 0,-9 0 0,0 0 0,9 0 0,-3 0 0,0 0 0,6 0 0,-1 0 0,1 0 0,-6 0 0,-1 0 0,0 0 0,0 0 0,-1 0 0,-1 0 0,10 0 0,-16 0 0,2 0 0,-7 0 0,-8 0 0,9 0 0,6 0 0,10 0 0,-8 0 0,1 0 0,5 0 0,-1 0 0,-4 0 0,0 0 0,-1 0 0,-1 0 0,2 0 0,8 0 0,-24 0 0,24 0 0,-14 0 0,17 0 0,-4 1 0,1-2 0,0-5 0,0 0 0,6 5 0,2-1 0,-5-3 0,0-2 0,-1-2 0,-1 1 0,-6 6 0,0-1 0,2-6 0,-2 1 0,4 8 0,4 0 0,-17 0 0,14 0 0,-12 0 0,1 0 0,2 0 0,8 0 0,4 0 0,0 0 0,-4 0 0,5-12 0,-19 9 0,16-9 0,-43 12 0,26 0 0,-31 0 0</inkml:trace>
+  <inkml:trace contextRef="#ctx0" brushRef="#br0" timeOffset="27117">2328 4882 24575,'33'0'0,"-17"0"0,13 0 0,-8 0 0,-5 0 0,13 0 0,4 0 0,-2 0 0,-10 0 0,2 0 0,-1 0 0,0 0 0,1 0 0,2 0 0,8 0 0,0 0 0,1 0 0,-1 0 0,-3 0 0,0 0 0,-3 0 0,-1 0 0,-1 0 0,1 0 0,1 0 0,-1 0 0,-1 0 0,-1 0 0,-1 0 0,-1 0 0,11 0 0,-1 0 0,-4 0 0,4 0 0,-17 0 0,14 0 0,-13 0 0,4 5 0,-1 1 0,-3-3 0,13 9 0,-26-12 0,9 0 0,-12 0 0,12 0 0,8 0 0,-1 0 0,2 0 0,5 0 0,1 0 0,3 0 0,0 0 0,3 0 0,0 0 0,1 0 0,-2 0 0,-1 0 0,-1 0 0,-4 0 0,1 0 0,0 0 0,-3 0 0,0 0 0,-3 0 0,-1 0 0,-4 0 0,3 0 0,0 0 0,-3 0 0,14 0 0,-27 0 0,8 0 0,-11 0 0,12 0 0,-9 0 0,26 0 0,-12 0 0,7 0 0,2 0 0,4 0 0,-4 0 0,-2 0 0,-7 0 0,12 0 0,-26 12 0,9-9 0,-12 8 0</inkml:trace>
+</inkml:ink>
+</file>
+
+<file path=ppt/ink/ink11.xml><?xml version="1.0" encoding="utf-8"?>
+<inkml:ink xmlns:inkml="http://www.w3.org/2003/InkML">
+  <inkml:definitions>
+    <inkml:context xml:id="ctx0">
+      <inkml:inkSource xml:id="inkSrc0">
+        <inkml:traceFormat>
+          <inkml:channel name="X" type="integer" min="-2.14748E9" max="2.14748E9" units="cm"/>
+          <inkml:channel name="Y" type="integer" min="-2.14748E9" max="2.14748E9" units="cm"/>
+          <inkml:channel name="F" type="integer" max="32767" units="dev"/>
+        </inkml:traceFormat>
+        <inkml:channelProperties>
+          <inkml:channelProperty channel="X" name="resolution" value="1000" units="1/cm"/>
+          <inkml:channelProperty channel="Y" name="resolution" value="1000" units="1/cm"/>
+          <inkml:channelProperty channel="F" name="resolution" value="0" units="1/dev"/>
+        </inkml:channelProperties>
+      </inkml:inkSource>
+      <inkml:timestamp xml:id="ts0" timeString="2026-03-16T20:42:14.430"/>
+    </inkml:context>
+    <inkml:brush xml:id="br0">
+      <inkml:brushProperty name="width" value="0.05292" units="cm"/>
+      <inkml:brushProperty name="height" value="0.05292" units="cm"/>
+      <inkml:brushProperty name="color" value="#FF0000"/>
+    </inkml:brush>
+  </inkml:definitions>
+  <inkml:trace contextRef="#ctx0" brushRef="#br0">6615 4723 24575,'26'0'0,"3"0"0,4 0 0,-9 0 0,2 0 0,0 0-622,7 0 1,1 0 0,1 0 621,0 0 0,0 0 0,-1 0 0,-3 0 0,0 1 0,0-2 0,2-4 0,0-2 0,-1 1 0,-6 4 0,0 2 0,-1-2 301,11-7 0,-2 0-301,-13 9 0,-2 0 308,13-12-308,0 9 0,-4-8 0,-9 10 0,1 2 954,8-1-954,4 0 0,0 0 0,-4 0 0,-8 0 0,-2 0 0,-1 0 0,12 0 0,-26 0 0,20 0 0,-20 0 0,9 0 0,6 0 0,-2 0 0,4 0 0,4-12 0,-21 9 0,9-9 0,-12 12 0</inkml:trace>
+</inkml:ink>
+</file>
+
+<file path=ppt/ink/ink12.xml><?xml version="1.0" encoding="utf-8"?>
+<inkml:ink xmlns:inkml="http://www.w3.org/2003/InkML">
+  <inkml:definitions>
+    <inkml:context xml:id="ctx0">
+      <inkml:inkSource xml:id="inkSrc0">
+        <inkml:traceFormat>
+          <inkml:channel name="X" type="integer" min="-2.14748E9" max="2.14748E9" units="cm"/>
+          <inkml:channel name="Y" type="integer" min="-2.14748E9" max="2.14748E9" units="cm"/>
+          <inkml:channel name="F" type="integer" max="32767" units="dev"/>
+        </inkml:traceFormat>
+        <inkml:channelProperties>
+          <inkml:channelProperty channel="X" name="resolution" value="1000" units="1/cm"/>
+          <inkml:channelProperty channel="Y" name="resolution" value="1000" units="1/cm"/>
+          <inkml:channelProperty channel="F" name="resolution" value="0" units="1/dev"/>
+        </inkml:channelProperties>
+      </inkml:inkSource>
+      <inkml:timestamp xml:id="ts0" timeString="2026-03-16T20:42:37.563"/>
+    </inkml:context>
+    <inkml:brush xml:id="br0">
+      <inkml:brushProperty name="width" value="0.05292" units="cm"/>
+      <inkml:brushProperty name="height" value="0.05292" units="cm"/>
+      <inkml:brushProperty name="color" value="#FF0000"/>
+    </inkml:brush>
+  </inkml:definitions>
+  <inkml:trace contextRef="#ctx0" brushRef="#br0">21749 6482 24575,'32'0'0,"-10"0"0,2 0 0,-1 0 0,2 0 0,7 0 0,1 0 0,-3 0 0,0 0 0,-4 0 0,0 0 0,0 0 0,9 0 0,-1 0 0,2 0 0,0 0 0,-8 0 0,0 0 0,-2 0 0,4 0 0,-1 0 0,7 0 0,-1 0 0,-14 0 0,-3 0 0,15 0 0,-18 0 0,14 0 0,-25 0 0,14 0 0,11 0 0,2 0 0,0 6 0,3 0 0,2-4 0,0-1 0,-2 4 0,1 2 0,-5-1 0,2 0 0,-4-1 0,-8-3 0,-1 1 0,14 12 0,-7-1 0,-21-11 0,12 9 0,-17-12 0,-17 0 0,12 0 0,-12 0 0</inkml:trace>
+</inkml:ink>
+</file>
+
+<file path=ppt/ink/ink13.xml><?xml version="1.0" encoding="utf-8"?>
+<inkml:ink xmlns:inkml="http://www.w3.org/2003/InkML">
+  <inkml:definitions>
+    <inkml:context xml:id="ctx0">
+      <inkml:inkSource xml:id="inkSrc0">
+        <inkml:traceFormat>
+          <inkml:channel name="X" type="integer" min="-2.14748E9" max="2.14748E9" units="cm"/>
+          <inkml:channel name="Y" type="integer" min="-2.14748E9" max="2.14748E9" units="cm"/>
+          <inkml:channel name="F" type="integer" max="32767" units="dev"/>
+        </inkml:traceFormat>
+        <inkml:channelProperties>
+          <inkml:channelProperty channel="X" name="resolution" value="1000" units="1/cm"/>
+          <inkml:channelProperty channel="Y" name="resolution" value="1000" units="1/cm"/>
+          <inkml:channelProperty channel="F" name="resolution" value="0" units="1/dev"/>
+        </inkml:channelProperties>
+      </inkml:inkSource>
+      <inkml:timestamp xml:id="ts0" timeString="2026-03-16T20:43:53.747"/>
+    </inkml:context>
+    <inkml:brush xml:id="br0">
+      <inkml:brushProperty name="width" value="0.05292" units="cm"/>
+      <inkml:brushProperty name="height" value="0.05292" units="cm"/>
+      <inkml:brushProperty name="color" value="#FF0000"/>
+    </inkml:brush>
+  </inkml:definitions>
+  <inkml:trace contextRef="#ctx0" brushRef="#br0">11483 10610 24575,'34'0'0,"-10"0"0,2 0 0,3 0 0,2 0-837,0 0 1,2 0 0,1 0 836,2 0 0,1 0 0,-1 0 0,-8 0 0,1 0 0,-1 0 0,0 0 0,8 0 0,0 0 0,-3 0 336,2 0 0,-1 0-336,4 0 0,-1 0 221,-12 0 1,-2 0-222,4 0 0,-1 0 0,-5 0 0,-2 0 0,13 0 1289,1 0-1289,-5 0 52,-9 0 1,0 0-53,9 0 0,4 0 0,-17 0 0,-4 0 0,-11 0 0</inkml:trace>
+  <inkml:trace contextRef="#ctx0" brushRef="#br0" timeOffset="1566">22344 13216 24575,'26'0'0,"0"0"0,0 0 0,9 0 0,2 1 0,1-2 0,-6-1 0,0-2 0,1 1 0,0 0-820,1 2 1,2 1 0,-1-1 0,1 0 693,0-1 1,0-2-1,0 1 1,-2 0 125,4 3 0,-2 0 0,-1 0 391,-6 0 1,-2 0 0,-2 0-392,0 0 0,-6 0 0,-7 0 0,-12 0 0</inkml:trace>
+</inkml:ink>
+</file>
+
+<file path=ppt/ink/ink14.xml><?xml version="1.0" encoding="utf-8"?>
+<inkml:ink xmlns:inkml="http://www.w3.org/2003/InkML">
+  <inkml:definitions>
+    <inkml:context xml:id="ctx0">
+      <inkml:inkSource xml:id="inkSrc0">
+        <inkml:traceFormat>
+          <inkml:channel name="X" type="integer" min="-2.14748E9" max="2.14748E9" units="cm"/>
+          <inkml:channel name="Y" type="integer" min="-2.14748E9" max="2.14748E9" units="cm"/>
+          <inkml:channel name="F" type="integer" max="32767" units="dev"/>
+        </inkml:traceFormat>
+        <inkml:channelProperties>
+          <inkml:channelProperty channel="X" name="resolution" value="1000" units="1/cm"/>
+          <inkml:channelProperty channel="Y" name="resolution" value="1000" units="1/cm"/>
+          <inkml:channelProperty channel="F" name="resolution" value="0" units="1/dev"/>
+        </inkml:channelProperties>
+      </inkml:inkSource>
+      <inkml:timestamp xml:id="ts0" timeString="2026-03-16T20:44:28.030"/>
+    </inkml:context>
+    <inkml:brush xml:id="br0">
+      <inkml:brushProperty name="width" value="0.05292" units="cm"/>
+      <inkml:brushProperty name="height" value="0.05292" units="cm"/>
+      <inkml:brushProperty name="color" value="#FF0000"/>
+    </inkml:brush>
+  </inkml:definitions>
+  <inkml:trace contextRef="#ctx0" brushRef="#br0">21722 6297 24575,'30'0'0,"-1"0"0,1 0 0,0 0 0,4 0 0,-1 0 0,-9 0 0,0 0 0,8 0 0,-2 0 0,1 0 0,-1 0 0,1 0 0,-6 0 0,-1 0 0,0 0 0,0 0 0,-1 0 0,-2 0 0,12 0 0,-11 0 0,1 0 0,14 0 0,-15 0 0,0 0 0,11 0 0,-6 0 0,6 0 0,-1 0 0,-4 0 0,-9 0 0,0 0 0,1 0 0,0 0 0,1 0 0,-1 0 0,0 0 0,0 0 0,5 0 0,0 0 0,6 0 0,-5 0 0,-2 0 0,-8 0 0,13 0 0,-26 0 0,9 0 0</inkml:trace>
+  <inkml:trace contextRef="#ctx0" brushRef="#br0" timeOffset="1467">18508 6615 8191,'-15'0'0,"3"0"1638,32 0 0,13 0-745,-7 0 1,2 0-894,2 0 0,4 0 0,2 0 0,-2 0 304,-4 0 0,-2 0 1,1 1-1,2-2-304,-1-2 0,2-1 0,0 0 0,-1 0 0,0 1 0,-1 1 0,0 2 0,-1-1 0,-1 0 549,8-5 1,-1-1-1,-1 2-549,-7 4 0,-2 1 0,-1 1 1638,1-1 0,-1 0 1042,9 0-2680,-3 0 0,-27 0 0,8 0 0</inkml:trace>
+  <inkml:trace contextRef="#ctx0" brushRef="#br0" timeOffset="6083">18733 6641 24575,'14'0'0,"5"0"0,3 0 0,1 0 0,3 0 0,3 0 0,3 0 0,-1 0-308,-2 0 1,-2 0 0,1 0 307,3 0 0,0 0 0,-3 0 151,-3 0 1,-2 0-152,4 0 0,-4 0 0,-6 0 0,0 0 0</inkml:trace>
+</inkml:ink>
+</file>
+
+<file path=ppt/ink/ink15.xml><?xml version="1.0" encoding="utf-8"?>
+<inkml:ink xmlns:inkml="http://www.w3.org/2003/InkML">
+  <inkml:definitions>
+    <inkml:context xml:id="ctx0">
+      <inkml:inkSource xml:id="inkSrc0">
+        <inkml:traceFormat>
+          <inkml:channel name="X" type="integer" min="-2.14748E9" max="2.14748E9" units="cm"/>
+          <inkml:channel name="Y" type="integer" min="-2.14748E9" max="2.14748E9" units="cm"/>
+          <inkml:channel name="F" type="integer" max="32767" units="dev"/>
+        </inkml:traceFormat>
+        <inkml:channelProperties>
+          <inkml:channelProperty channel="X" name="resolution" value="1000" units="1/cm"/>
+          <inkml:channelProperty channel="Y" name="resolution" value="1000" units="1/cm"/>
+          <inkml:channelProperty channel="F" name="resolution" value="0" units="1/dev"/>
+        </inkml:channelProperties>
+      </inkml:inkSource>
+      <inkml:timestamp xml:id="ts0" timeString="2026-03-16T20:44:39.747"/>
+    </inkml:context>
+    <inkml:brush xml:id="br0">
+      <inkml:brushProperty name="width" value="0.05292" units="cm"/>
+      <inkml:brushProperty name="height" value="0.05292" units="cm"/>
+      <inkml:brushProperty name="color" value="#FF0000"/>
+    </inkml:brush>
+  </inkml:definitions>
+  <inkml:trace contextRef="#ctx0" brushRef="#br0">18256 6456 24575,'22'0'0,"0"0"0,2 0 0,1 0 0,-1 0 0,0 0 0,8 0 0,-2 0 0,1 0 0,-1 0 0,2 0 0,-8 0 0,0 0 0,8 0 0,2 0 0,-8 0 0,0 0 0,0 0-141,1 0 1,0 0-1,0 0 141,0 0 0,-1 0 0,2 0 0,5 0 0,2 0 0,-2 0-281,-4 0 1,-2 0 0,1 0 280,6 0 0,2 0 0,-1 0 0,-2 0 0,1 0 0,-3 0 0,2 0 0,-1 0 0,0 0 0,-3 0 0,4 0 0,-17 0 0,2 0 0</inkml:trace>
+</inkml:ink>
+</file>
+
 <file path=ppt/ink/ink2.xml><?xml version="1.0" encoding="utf-8"?>
 <inkml:ink xmlns:inkml="http://www.w3.org/2003/InkML">
   <inkml:definitions>
@@ -910,6 +1240,127 @@
     </inkml:brush>
   </inkml:definitions>
   <inkml:trace contextRef="#ctx0" brushRef="#br0">5569 11642 24575,'12'-33'0,"-9"5"0,10 4 0,4-2 0,-2-2 0,3-4-820,-1 7 1,3-2 0,1-2 0,-1 0 507,-3 4 0,-2-1 0,1 0 1,1 0-1,2 0-26,1 0 1,3-1 0,0 0-1,1 1 1,-1-1 0,-2 1 337,0-3 0,-1 0 0,-1 1 0,0 0 0,2 1 0,0 1 0,2 0 0,0 2 0,-1-1 0,-1 1 193,0-3 0,-1 0 0,-1 1 0,-1 1-193,0 1 0,-2 2 0,-2-1 0,3-7 0,-1 3 0,0 10 0,-3 2 2075,-8-18-2075,9 20 0,1-2 1538,-13-3 0,-1-2-1538,10 0 0,1 0 468,-1 0 1,-1-1-469,3-4 0,2-1 0,1-1 0,0 1 0,1 1 0,-1 1 0,-3 1 0,2 1 0,4 4 0,0 4 0,-3-1 0,-1 0 0,-1 0 0,1-1 0,1-2 0,0-2 0,-2 1 0,0-2 0,11-5 0,0-1 0,-10 6 0,1 0 0,4 4 0,2 1 0,-2-1 0,-5-7 0,1 2 0,9 10 0,0-1 0,-11-9 0,0 3 0,5 17 0,0 1 0,-3-11 0,13 1 0,-26 8 0,9-9 0</inkml:trace>
+</inkml:ink>
+</file>
+
+<file path=ppt/ink/ink6.xml><?xml version="1.0" encoding="utf-8"?>
+<inkml:ink xmlns:inkml="http://www.w3.org/2003/InkML">
+  <inkml:definitions>
+    <inkml:context xml:id="ctx0">
+      <inkml:inkSource xml:id="inkSrc0">
+        <inkml:traceFormat>
+          <inkml:channel name="X" type="integer" min="-2.14748E9" max="2.14748E9" units="cm"/>
+          <inkml:channel name="Y" type="integer" min="-2.14748E9" max="2.14748E9" units="cm"/>
+          <inkml:channel name="F" type="integer" max="32767" units="dev"/>
+        </inkml:traceFormat>
+        <inkml:channelProperties>
+          <inkml:channelProperty channel="X" name="resolution" value="1000" units="1/cm"/>
+          <inkml:channelProperty channel="Y" name="resolution" value="1000" units="1/cm"/>
+          <inkml:channelProperty channel="F" name="resolution" value="0" units="1/dev"/>
+        </inkml:channelProperties>
+      </inkml:inkSource>
+      <inkml:timestamp xml:id="ts0" timeString="2026-03-16T20:30:46.498"/>
+    </inkml:context>
+    <inkml:brush xml:id="br0">
+      <inkml:brushProperty name="width" value="0.05292" units="cm"/>
+      <inkml:brushProperty name="height" value="0.05292" units="cm"/>
+      <inkml:brushProperty name="color" value="#FF0000"/>
+    </inkml:brush>
+  </inkml:definitions>
+  <inkml:trace contextRef="#ctx0" brushRef="#br0">1164 3016 24575,'0'26'0,"0"0"0,0 0 0,0 6 0,0 1 0,0 1 0,0 1 0,0 1 0,0 1-720,0-4 0,0 0 0,0 0 0,0-1 720,0 5 0,0 0 0,0-2 0,0-1 0,0 0 0,0-4 456,0 2 0,0-3-456,0-6 0,0-2 473,0 11-473,0-16 0,0 2 0,0-6 1495,0-9-1495,0 26 0,0-13 0,0 17 0,0-12 0,0 2 0,0 1 0,0 0 0,0 0 0,0 1 0,0 1 0,0-2 0,0-8 0,0 13 0,0-26 0,0 9 0,0-12 0</inkml:trace>
+  <inkml:trace contextRef="#ctx0" brushRef="#br0" timeOffset="38433">5292 5636 24575,'22'0'0,"0"0"0,1 0 0,2 0 0,0 0 0,1 1 0,1-2 0,0-4 0,1-2 0,-2 1 0,6 4 0,-1 0 0,-5-4 0,-1-1 0,-2 2 0,8 5 0,1 0 0,-20 0 0,5 0 0,-1 0 0,3 0 0,1 0 0,8 0 0,-4 0 0,2 0 0,-5 0 0,0 0 0,6 0 0,-1 0 0,-6 0 0,0 0 0,0 0 0,-2 0 0,-2 0 0,14 0 0,-27 18 0,8-14 0,-11 14 0,0-18 0,0 0 0</inkml:trace>
+  <inkml:trace contextRef="#ctx0" brushRef="#br0" timeOffset="40117">7832 5543 24575,'33'0'0,"-6"0"0,5 0 0,1 0 0,2 0 0,1 0 0,4 0-547,-11 0 1,2 0 0,1 0 0,1 0 0,1 0 0,-2 0-1,3 0 1,-1 0 0,1 0 0,0 0 0,-1 0 0,1 0 503,-2 0 1,-1 0 0,1 0-1,-1 0 1,1 0 0,-1 0-122,2 0 0,-1 0 0,1 0 0,0 0 0,-1 0 1,-1 0 163,2 0 0,-2 0 0,0 0 0,0 0 0,0 0 80,-1 0 1,0 0 0,0 0 0,-1 0 0,0 0-81,2 0 0,1 0 0,-2 0 0,-2 0 0,-1 0 0,-2 0 0,0 0 0,14 0 0,-5 0 2932,2 0-2932,-5 0 2724,-8 0-2724,8 0 1731,-1 0-1731,-6 0 0,0 0 0,3 0 0,-7 0 0,-10 0 0,-11 0 0,0 0 0,0 0 0</inkml:trace>
+  <inkml:trace contextRef="#ctx0" brushRef="#br0" timeOffset="62667">3969 3651 24575,'14'0'0,"16"0"0,-2 0 0,-8 0 0,1 0 0,5 1 0,-1-2 0,-4-4 0,0-2 0,-2 6 0,1 0 0,0-6 0,-2 2 0,10 5 0,-7 0 0,2 0 0,-20 0 0,27 0 0,-26 0 0,26 0 0,-27 0 0,20 0 0,-20 0 0,9 0 0,-12 0 0,0 0 0,17 0 0,-12 0 0,24 0 0,-26 0 0,27 0 0,-26 0 0,14 12 0,-7-10 0,-8 10 0,9-12 0,0 0 0,-9 0 0,9 0 0,5 0 0,-12 0 0,24 0 0,-26 0 0,20 0 0,-2 0 0,7 0 0,-8 0 0,-2 0 0,-2 0 0,14 0 0,-27 0 0,8 0 0,-11 0 0,12 12 0,-9-9 0,27 9 0,-14-12 0,8 0 0,2 0 0,5 0 0,-6 0 0,0 0 0,2 0 0,-6 0 0,3 0 0,-22 0 0,28 0 0,-26 0 0,26 0 0,-27 0 0,26 0 0,-25 0 0,14 0 0,-6 0 0,-9 0 0,20 0 0,-20 0 0,27 0 0,-14 0 0,16 0 0,0 0 0,-15 0 0,12 0 0,-8 0 0,7 0 0,4 0 0,0 0 0,-4 0 0,-7 0 0,2 0 0,-20 0 0,27 0 0,-26 0 0,14 0 0,-7 0 0,-8 0 0,9 0 0,6 0 0,-14 0 0,14 0 0,-18 0 0,12 0 0,-10 0 0,22 0 0,-3 0 0,6 0 0,-8 0 0,1 0 0,-1 0 0,1 0 0,1 0 0,0 0 0,-1 0 0,-1 0 0,2 0 0,2 0 0,-2 0 0,-5 0 0,2 0 0,-7 0 0,-8 0 0,27 0 0,-2 0 0,-8 0 0,1 0 0,4 0 0,1 0 0,9 0 0,1 0 0,-7 0 0,1 0 0,0 0 0,2 0 0,0 0-265,-5 0 1,-1 0 0,2 0 264,3-4 0,0 0 0,1 0 0,-3 3 0,0 0 0,-1 0-29,9-5 0,-2 0 29,-1 6 0,-3 0 0,-9 0 0,-1 0 0,4 0 0,0 0 0,-2 0 0,-1 0 0,15 0 395,-6 0 0,0 0-395,0 0 30,-9 0 1,0 0-31,10 0 0,-4 0 0,-3 0 0,0 0 0,6 0 0,-6 0 0,0 0 0,3 0 0,-3-5 0,0-2 0,6 5 0,-7-5 0,2 2 0,-6 4 0,-1 2 0,2-1 0,-1 0 0,0 0 0,0 0 0,-1 0 0,0 0 0,1 0 0,0 0 0,1 1 0,-1-2 0,0-8 0,0 0 0,5 7 0,0 0 0,6-16 0,-6 17 0,0 2 0,3-1 0,4 0 0,0 0 0,-16 0 0,14 0 0,-27 0 0,9 0 0,-1 0 0,-8 0 0,27 0 0,-26 0 0,25 0 0,-26 0 0,27 0 0,-26 0 0,14 0 0,-18 0 0,12 0 0,-9 0 0,20 18 0,-20-14 0,26 14 0,-12-18 0,15 0 0,-17 0 0,14 0 0,-13 0 0,5 0 0,8 0 0,-24 0 0,24 0 0,-26 0 0,20 0 0,-20 0 0,9 0 0,-12 0 0,0 0 0,18 0 0,-14 12 0,26-10 0,-10 10 0,-4-12 0,14 0 0,-16 0 0,19 0 0,-17 0 0,13 0 0,-14 0 0,17 0 0,-4 0 0,-9 0 0,1 0 0,7 0 0,6 0 0,-1 0 0,-16 0 0,14 0 0,-16 0 0,1 0 0,14 0 0,-12 0 0,3 12 0,10-9 0,-26 9 0,25-12 0,-14 0 0,0 0 0,14 0 0,-24 0 0,24 0 0,-14 0 0,17 0 0,-16 0 0,14 0 0,-27 17 0,26-12 0,-25 12 0,26-17 0,-16 0 0,19 0 0,-17 0 0,13 0 0,-26 0 0,27 0 0,-26 0 0,26 0 0,-28 0 0,22 0 0,-3 0 0,-2 0 0,1 0 0,1 0 0,-1 0 0,1 0 0,-2 0 0,2 0 0,8 0 0,-25 0 0,26 0 0,-15 0 0,-1 0 0,16 0 0,-14 0 0,16 0 0,-17 0 0,5 0 0,1 0 0,4 0 0,-3 0 0,2 0 0,8 0 0,-10 0 0,0 0 0,9 0 0,-1 0 0,2 0 0,4 0 0,-13 0 0,0 0 0,9 0 0,1 0 0,-17 0 0,13 0 0,-8 0 0,7 0 0,-3 0 0,0 0 0,6 0 0,-9 0 0,0 0 0,10 0 0,-9 0 0,0 0 0,13 0 0,-12 6 0,-4 0 0,-5-3 0,14 9 0,-24-12 0,24 0 0,-26 0 0,9 0 0,-12 0 0,0 0 0,12 0 0,-9 12 0,8-9 0,-11 8 0,0-11 0,0 0 0,-11 0 0,8-11 0,-21-4 0,14-1 0,0 0 0,-4 1 0,0 2 0,-3 2 0,1 1 0,2-2 0,-16 12 0,26-12 0,-14 10 0,18-10 0</inkml:trace>
+  <inkml:trace contextRef="#ctx0" brushRef="#br0" timeOffset="109150">5067 4379 24575,'22'0'0,"0"0"0,7 0 0,2 0 0,-5 0 0,1 0 0,1 0-882,7 0 0,3 0 1,-1 0 881,-1 0 0,0 0 0,1 0 0,-7 0 0,0 0 0,0 0 0,-1 0 0,1 0 0,-1 0 0,0 0 111,5-1 0,1 1 0,-4 1-111,-1 5 0,-1 0 0,-2-5 0,2-1 0,-3 2 276,-4 4 0,-1-1-276,4-5 0,0 0 0,-2 6 0,-1 0 0,2-5 0,1 1 0,7 13 0,1-1 0,-3-11 0,0-1 670,-6 7 0,0-1-670,7-6 0,0-4 210,-6 2 0,-1 0-210,0 6 0,0 0 0,-2-4 0,0-1 0,1 5 0,-2 0 0,16-6 0,-15 0 0,2 0 0,1 0 0,0 0 0,6 0 0,-7 0 0,2 0 0,-6 0 0,-1 0 0,2 0 0,-1 0 0,1 0 0,-2 0 0,13 0 0,1 18 0,-5-14 0,-9 5 0,0 0 0,9-9 0,4 0 0,0 0 0,-4 0 0,5 0 0,-1 0 0,-4 0 0,-4 0 0,2 0 0,-2 0 0,1 0 0,5 1 0,0-2 0,-4-8 0,1 0 0,2 7 0,-1 0 0,-4-8 0,1 2 0,1 7 0,0 2 0,-6-1 0,0 0 0,5 0 0,0 0 0,-1 0 0,1 0 0,-2 0 0,2 0 0,7 0 0,-2 0 0,1 0 0,1 0 0,-3 0 0,-24 0 0,24 0 0,-26 0 0,9 0 0,17 0 0,-10 0 0,16 0 0,4 0 0,-13 0 0,-1 0 0,1 0 0,0 0 0,0 0 0,4 0 0,1 0 0,-4 0 0,1 0 0,-1 0 0,2 0 0,1 0 0,-3 0 0,1 0 0,-1 0 0,4 0 0,-2 0 0,5 0 0,-2 0 0,-7 0 0,-1 0 0,7-1 0,0 2 0,-7 7 0,0 2 0,6-8 0,0 0 0,3 7 0,-1 0 0,-1-8 0,-2-2 0,-4 1 0,-1 0 0,9-2 0,-4 4 0,-10 9 0,3-10 0,-3 1 0,-16 10 0,9-12 0,5 0 0,-12 0 0,12 0 0,-5 0 0,20 0 0,-1 0 0,2 0 0,-4 0 0,-25 0 0,14 0 0,-6 0 0,-9 12 0,20-9 0,10 9 0,-11-12 0,4 0 0,-1 0 0,1 0 0,1 0 0,0 0 0,-1 0 0,2 0-174,2 0 1,2 0-1,-2 0 174,-2 0 0,-1 0 0,-1 0 0,1 0 0,-1 0 0,-1 0 0,9 0 0,-2 0 0,-7 0 0,-1 0 0,-2 0 0,0 0 0,10 0 0,-16 0 0,14 0 0,-27 0 260,15 0 1,5 0-261,-4 0 0,11 0 0,2 0 0,-1 0 0,-5 0 0,-2 0 0,-8 0 0,1 0 0,-17 0 0,12 0 0,9-12 0,7 9 0,-4-3 0,2 0 0,-5 5 0,0 2 0,11 0 0,1-2 0,-9-5 0,0 0 0,5 5 0,0-1 0,-8-4 0,-1 1 0,1 4 0,-2 2 0,1-1 0,4 0 0,-21 0 0,8 0 0,7 0 0,-13 0 0,24 0 0,-9 0 0,-3 0 0,12 0 0,-14 0 0,5 0 0,4 0 0,0 0 0,0 0 0,1 0 0,-1 0 0,1 0 0,0 0 0,-4 0 0,-2 0 0,4 0 0,0 0 0,-5 0 0,-13 0 0,12 0 0</inkml:trace>
+  <inkml:trace contextRef="#ctx0" brushRef="#br0" timeOffset="171500">688 13150 24575,'36'0'0,"-1"0"0,1 0 0,-8 0 0,2 0 0,1 0 0,1 0 0,1 0 0,1 0 0,-1 0 0,1 0 0,1 0 0,0 0 0,2 0 0,0 0 0,2 0 0,-1 0-298,-3 0 0,0 0 0,1 0 0,1 0 0,0 0 0,1 0 0,0 0 0,1 0 1,-1 0-1,1 0 0,0 0 45,-4 0 1,0 0 0,1 0 0,0 0 0,1 0 0,-1 0 0,1 0 0,0 0 0,-1 0 0,1 0 0,0 0 0,0 0 0,0 0 17,-2 0 1,0 0 0,0 0 0,0 0 0,0 0 0,1 0 0,-1 0 0,0 0 0,1 0 0,-1 0 0,1 0 0,-1 0 0,0 0 0,1 0-1,-1 0 1,1 0 0,0 0 0,0 0 0,0 0 0,0 0 0,0 0 0,0 0 0,0 0 0,-1 0 0,1 0 0,-1 0 0,0 0 0,1 0 138,0 0 0,-1 0 0,1 0 0,0 0 0,-1 0 0,1 0 0,-1 0 1,0 0-1,0 0 0,0 0 0,0 0 0,0 0 0,-1 0 96,2 0 0,0 0 0,0 0 0,0 0 0,0 0 0,0 0 0,-1 0 0,0 0 0,0 0 0,0 0 0,0 0 0,-1 0-179,4 0 0,-1 0 0,0 0 1,0 0-1,0 0 0,-1 0 1,0 0-1,0 0 0,-1 0 1,0 0 178,1 0 0,-1 0 0,0 0 0,0 0 0,-1 0 0,0 0 0,0 0 0,-1 0 0,0 0 134,5 0 0,0 0 1,0 0-1,-1 0 0,-1 0 1,0 0-1,-2 0-134,1 0 0,0 0 0,-2 0 0,0 0 0,0 0 0,0 0 315,5 0 0,0 0 0,-1 0 0,0 0 0,-1 0-315,-4 0 0,-1 0 0,-1 0 0,0 0 0,0 0 0,2 0 0,-1 0 0,1 0 0,0 0 0,0 0 0,2 0 0,0 0 0,1 0 0,-1 0 0,0 0 0,4 0 0,-1 1 0,0-1 0,1-1 0,-8-1 0,0 0 0,0-1 0,0 0 0,-1 1 655,5 1 0,-1 2 0,0-2 1,-2-1-656,6-5 0,-2-2 0,2 2 0,-6 4 0,2 3 0,-1 1 0,0-2 0,4-3 0,0-1 0,1 2 0,-5 2 0,1 2 0,0 0 0,0-2 0,4-4 0,-2-2 0,1 1 0,1 4 0,0 2 0,0-2 0,-3-4 0,0-1 0,2 2 0,-6 4 0,1 1 0,1 1 0,0-1 0,2 0 0,1 0 0,0 0 0,2 0 384,-3 0 0,2 0 0,0 0 0,-1 0 0,0 0-384,-3 0 0,0 0 0,-1 0 0,0 0 0,1 0 0,2 0 0,1 0 0,0 0 0,1 0 0,-1 0 0,-1 0 0,1 0 0,-1 0 0,0 0 0,-1 0 220,4 0 1,-2 0 0,1 0 0,2 0-221,-3 0 0,2 0 0,1 0 0,-1 0 0,-1 0 0,-3 0 0,-1 0 0,0 0 0,0 0 0,1 0-121,3 0 0,2 0 0,-1 0 0,1 0 0,0 0 121,-6 0 0,0 0 0,0 0 0,0 0 0,-1 0 0,1 0 0,3 0 0,0 0 0,-1 0 0,1 0 0,-1 0-139,0 0 0,0 0 0,0 0 0,0 0 0,1 0 139,-5 0 0,1 0 0,1 0 0,-1 0 0,1 0 0,0 0 0,2 0 0,0 0 0,0 0 0,1 0 0,0 0 0,0 0-127,2 0 1,-1 0 0,1 0 0,0 0-1,0 0 1,1 0 126,-3 0 0,0 0 0,1 0 0,-1 0 0,1 0 0,-1 0 0,0 0 0,3 0 0,-1 0 0,-1 0 0,1 0 0,0 0 0,0 0 0,-3 0 0,0 0 0,0 0 0,0 0 0,0 0 0,0 0 0,-1 0 0,2 0 0,0-1 0,0 1 0,-1 0 0,0 0 0,0 1-23,-2 1 0,0 1 0,0 0 0,0 0 0,-1 1 0,1-1 23,5 0 0,0 0 0,-1 0 0,1 0 0,-2 1 0,-2 0 0,-1 0 0,0 0 0,0 0 0,1 1 0,3-1 0,0 1 0,0 0 0,1 0 0,0-1 16,-5 0 1,0-1 0,0 1 0,-1-1 0,1 1 0,0-1-17,0-1 0,-1 1 0,1-1 0,-1 1 0,1 0 0,0 0 0,2 1 0,2 2 0,-1-1 0,0 1 0,0-1 0,-1-2 0,1-1 0,-1-1 0,-1-2 0,0 1 0,1 1 0,-1 1 1,-1 1 0,1 0 0,0-1 0,-1 0-1,6-1 0,-1-1 0,1-1 0,-1 1 0,-1 0 0,1 0 0,0 0 0,0 0 0,-6 0 0,1 0 0,-1 0 0,1 0 0,1 0 0,0 0 0,1 0 0,0 0 0,0 0 0,1 0 72,-4 0 0,1 0 0,0 0 0,0 0 1,0 0-1,0 0-72,0 0 0,-1 0 0,0 0 0,1 0 0,-1 0 0,2 0 0,2 0 0,1 0 0,0 0 0,0 0 0,0 0 0,-1 0 0,-2 0 0,0 0 0,0 0 0,-1 0 0,0 0 0,-1 0 0,4 0 0,0 0 0,-2 0 0,1 0 0,-2 0 234,5 0 0,0 0 0,-2 0 0,-1 0-234,5 0 0,-2 0 0,-3 0 1152,0 0 1,-3 0-1153,3 0 0,-6 0 2075,-14 0-2075,16 0 3276,-14 0-3243,7 0 0,4 0-33,7-6 0,4 0-214,-12 5 0,2 1 1,1 0-1,1-2 214,4-3 0,1-4 0,1 1 0,0 1 0,-5 3 0,1 1 0,0 1 0,0-1 0,0-1-444,0-2 0,0-1 0,0 0 0,0 0 0,-1 1 444,4 2 0,0 1 0,0 0 0,1-1 0,-5-2 0,0 0 0,0-1 0,0 1 0,-1 1 0,3 3 0,0 2 0,-1-1 0,0 0 0,0-3 0,0-1 0,-1 0 0,0 1-29,4 3 0,-2 2 0,-3-1 29,3 0 0,-5 0 0,4 0 0,-20 0 0,-12 0 0</inkml:trace>
+  <inkml:trace contextRef="#ctx0" brushRef="#br0" timeOffset="181850">6641 5569 24575,'22'0'0,"0"0"0,7 0 0,2 0 0,0 0 0,3 0 0,0 0-1093,1 0 1,1 0 0,2 0 1031,-4 0 1,2 0 0,0 0 0,0 0-417,-1 0 1,0 0 0,0 0 0,1 0 476,-3 0 0,1 0 0,0 0 0,1 0 0,0 0-222,-4 0 0,1 0 0,0 0 0,0 0 1,0 0-1,0 0 222,4 0 0,-1 0 0,1 0 0,-1 0 0,1 0 0,-5 0 0,1 0 0,1 0 0,-1 0 0,-1 0 0,-2 0-133,6 0 0,-3 0 0,0 0 1,-2 0 132,3 0 0,-2 0 0,-2 0 651,4 0 1,-4 0-652,-1 0 2120,-8 0-2120,4 0 3069,-21 0-3069,8 0 793,7 0-793,-2 0 0,8 0 0,2 0 0,-2 0 0,1 0 0,7 1 0,2-2 0,-4-4 0,0-1 0,2 4 0,1 1 0,-3-5 0,0 0 0,4 5 0,-2 2 0,-6-1 0,-3 0 0,9 0 0,-8 0 0,-4 0 0,-4 0 0,2 0 0,-6 12 0,-9-9 0,20 8 0,9-11 0,5 0 0,-9 0 0,2 0 0,-4 0 0,0 0 0,-4 0 0,-1 0 0,5 0 0,-2 0 0,4 0 0,-7 0 0,8 0 0,-25 0 0,26 0 0,-16 0 0,7 0 0,3 0 0,12 0 0,-13 0 0,0 0 0,9 0 0,1 0 0,-6 0 0,6 0 0,-1 0 0,-4 0 0,-8 0 0,-2 0 0,-2 0 0,14 0 0,-27 0 0,9 0 0,-12 0 0,11 0 0,10 0 0,7 0 0,4 0 0,-10 0 0,0 0 0,15 0 0,-3 0 0,-17 0 0,-5 0 0,-9 12 0,9-9 0,-12 9 0,0-12 0,0 0 0,12 0 0,-9 0 0,15 0 0,5 0 0,-4 0 0,6 0 0,0 0 0,-9 0 0,13 18 0,-26-14 0,9 14 0,-12-18 0,0 0 0,-12 0 0,9 0 0,-8 0 0</inkml:trace>
+  <inkml:trace contextRef="#ctx0" brushRef="#br0" timeOffset="587699">5477 6548 24575,'22'0'0,"0"0"0,1 0 0,2 0 0,0 0 0,2 0 0,-1 0 0,9 0 0,-1 0 0,-8 0 0,1 0 0,-2 0 0,6 0 0,-1 0 0,2 0 0,0 0 0,-2 1 0,1-2 0,-6-4 0,1-2 0,0 2 0,9 3 0,0-1 0,0-5 0,2-1 0,-10 4 0,1 1 0,-1 1 0,2 1 0,1 1 0,0-3 0,3 0 0,-2 0 0,1 4 0,-1 0 0,2 1 0,0-2 0,-3-4 0,-3-1 0,-5 4 0,-2 1 0,0-5 0,-1 0 0,1 5 0,-1 2 0,8-1 0,6 0 0,-1 0 0,-4 0 0,4 0 0,-17 0 0,14 0 0,-24 0 0,24 0 0,-8 0 0,7 0 0,-8 0 0,-8 0 0,0 0 0,-9 0 0,26 0 0,-1 0 0,-8 0 0,1 0 0,8 0 0,0 0 0,7 0 0,-4 0 0,-2 0 0,1 0 0,1 0 0,-8 0 0,-4 0 0,-3 12 0,12-9 0,-26 8 0,9-11 0,-12 0 0,17 0 0,-12 12 0,12-9 0,-5 9 0,-9-12 0,21 0 0,-21 0 0,8 0 0,-11 0 0,18 0 0,-2 0 0,3 0 0,0 0 0,9 0 0,5 0 0,-19 0 0,16 0 0,-26 0 0,14 0 0,-18 0 0</inkml:trace>
+  <inkml:trace contextRef="#ctx0" brushRef="#br0" timeOffset="594449">3559 7422 24575,'28'0'0,"0"0"0,5 0 0,3 0 0,-6 0 0,2 0 0,0 0-718,0 0 1,1 0 0,0 0 717,2 0 0,-1 0 0,2 0 0,-9 0 0,1 0 0,0 0 0,2 0-512,3 0 0,2 0 1,0 0-1,0 0 512,1-3 0,1 0 0,0-1 0,0 2 0,-2 1 0,1 1 0,-1 0 0,0-2 0,1-3 0,0-2 0,0 0 0,-1 2-125,-5 4 0,0 0 1,0 1-1,0-1 125,3-1 0,0-2 0,0 1 0,-1 1 0,5 1 0,-1 1 0,0 1-107,-3-1 0,1 0 0,-3 0 107,6 0 0,-2 0 0,-2 0 0,-1 0 0,-1 0 0,-2 0 441,-4 0 1,-1 0-442,1 0 0,0 0 2021,3 0-2021,-8 0 1699,4 0-1699,-21 0 416,8 0-416,7 0 0,-2 0 0,16 0 0,1 0 0,-17 0 0,13 0 0,-26 11 0,9-8 0,-12 9 0,0-12 0,0 0 0</inkml:trace>
+</inkml:ink>
+</file>
+
+<file path=ppt/ink/ink7.xml><?xml version="1.0" encoding="utf-8"?>
+<inkml:ink xmlns:inkml="http://www.w3.org/2003/InkML">
+  <inkml:definitions>
+    <inkml:context xml:id="ctx0">
+      <inkml:inkSource xml:id="inkSrc0">
+        <inkml:traceFormat>
+          <inkml:channel name="X" type="integer" min="-2.14748E9" max="2.14748E9" units="cm"/>
+          <inkml:channel name="Y" type="integer" min="-2.14748E9" max="2.14748E9" units="cm"/>
+          <inkml:channel name="F" type="integer" max="32767" units="dev"/>
+        </inkml:traceFormat>
+        <inkml:channelProperties>
+          <inkml:channelProperty channel="X" name="resolution" value="1000" units="1/cm"/>
+          <inkml:channelProperty channel="Y" name="resolution" value="1000" units="1/cm"/>
+          <inkml:channelProperty channel="F" name="resolution" value="0" units="1/dev"/>
+        </inkml:channelProperties>
+      </inkml:inkSource>
+      <inkml:timestamp xml:id="ts0" timeString="2026-03-16T20:35:40.247"/>
+    </inkml:context>
+    <inkml:brush xml:id="br0">
+      <inkml:brushProperty name="width" value="0.05292" units="cm"/>
+      <inkml:brushProperty name="height" value="0.05292" units="cm"/>
+      <inkml:brushProperty name="color" value="#FF0000"/>
+    </inkml:brush>
+  </inkml:definitions>
+  <inkml:trace contextRef="#ctx0" brushRef="#br0">19764 7646 24575,'23'0'0,"0"0"0,3 0 0,1 0 0,3 0 0,0 0 0,4 0 0,-2 0 0,-7 0 0,-1 0 0,8 0 0,-2 0 0,0 0 0,0 0 0,2 0 0,-7 0 0,-1 0 0,0 0 0,0 0 0,7 0 0,0 0 0,-10 0 0,0 0 0,5 0 0,1 0 0,2 0 0,0 0 0,-5 0 0,0 0 0,2 0 0,1 0 0,2 0 0,-1 0 0,9 0 0,-15 0 0,0 0 0,0 0 0,0 0 0,2 0 0,1 0 0,8 0 0,0 0 0,-3 0 0,0 0 0,-5 0 0,1 0 0,0 0-184,1 0 0,0 0 0,0 0 184,-2 0 0,1 0 0,-1 0 0,11 0 0,-1 0 0,-8 0 0,-3 0 0,0 0 0,-2 0 0,-3 0 0,-15 0 0,14 0 0,-18 0 0,0 0 0</inkml:trace>
+</inkml:ink>
+</file>
+
+<file path=ppt/ink/ink8.xml><?xml version="1.0" encoding="utf-8"?>
+<inkml:ink xmlns:inkml="http://www.w3.org/2003/InkML">
+  <inkml:definitions>
+    <inkml:context xml:id="ctx0">
+      <inkml:inkSource xml:id="inkSrc0">
+        <inkml:traceFormat>
+          <inkml:channel name="X" type="integer" min="-2.14748E9" max="2.14748E9" units="cm"/>
+          <inkml:channel name="Y" type="integer" min="-2.14748E9" max="2.14748E9" units="cm"/>
+          <inkml:channel name="F" type="integer" max="32767" units="dev"/>
+        </inkml:traceFormat>
+        <inkml:channelProperties>
+          <inkml:channelProperty channel="X" name="resolution" value="1000" units="1/cm"/>
+          <inkml:channelProperty channel="Y" name="resolution" value="1000" units="1/cm"/>
+          <inkml:channelProperty channel="F" name="resolution" value="0" units="1/dev"/>
+        </inkml:channelProperties>
+      </inkml:inkSource>
+      <inkml:timestamp xml:id="ts0" timeString="2026-03-16T20:37:24.047"/>
+    </inkml:context>
+    <inkml:brush xml:id="br0">
+      <inkml:brushProperty name="width" value="0.05292" units="cm"/>
+      <inkml:brushProperty name="height" value="0.05292" units="cm"/>
+      <inkml:brushProperty name="color" value="#FF0000"/>
+    </inkml:brush>
+  </inkml:definitions>
+  <inkml:trace contextRef="#ctx0" brushRef="#br0">5040 10702 24575,'0'0'0</inkml:trace>
+  <inkml:trace contextRef="#ctx0" brushRef="#br0" timeOffset="2217">5067 10702 24575,'-33'0'0,"14"0"0,-1 0 0,-6 0 0,-1 0 0,-9 0 0,0 0 0,1 0 0,1 0 0,7 0 0,1 0 0,1 0 0,-1 0 0,3 0 0,-9 0 0,20 12 0,12-9 0,0 26 0,12-24 0,3 24 0,0-12 0,2-1 0,-3-1 0,0 1 0,11 6 0,0 0 0,-10-5 0,1-2 0,9-6 0,0-2 0,3 11 0,-8-24 0,-2-6 0,-2-4 0,2-5 0,-18-2 0,0 20 0,0-26 0,-18 12 0,14-3 0,-9 6 0,-4 4 0,-3 7 0,4-8 0,-2 22 0,18-8 0,0 9 0,0 0 0,0-9 0,0 8 0,18-11 0,-14 0 0,25 0 0,-8 0 0,-5 0 0,2 0 0,-18-11 0,-18 8 0,-16-9 0,11 11 0,-2 2 0,-1-1 0,-1 0 0,-3 0 0,3 0 0,2 0 0,-5 0 0,30 12 0,0-9 0,0 26 0,18-24 0,-14 12 0,26-17 0,2 0 0,-1 0 0,-5 0 0,-2 0 0,-8 0 0,13 0 0,-26-17 0,9 0 0,-12-3 0,0-4 0,-12 21 0,9-8 0,-26 11 0,25 0 0,-14 11 0,18 4 0,0 17 0,0-15 0,0 12 0,0-26 0,18 9 0,-14-12 0,25 0 0,-26-12 0,9 9 0,-12-26 0,-12 24 0,9-24 0,-26 26 0,13-9 0,-5 24 0,9-9 0,12 8 0,0 7 0,0-13 0,12 12 0,-9-17 0,9-17 0,-12 12 0,0-13 0</inkml:trace>
+</inkml:ink>
+</file>
+
+<file path=ppt/ink/ink9.xml><?xml version="1.0" encoding="utf-8"?>
+<inkml:ink xmlns:inkml="http://www.w3.org/2003/InkML">
+  <inkml:definitions>
+    <inkml:context xml:id="ctx0">
+      <inkml:inkSource xml:id="inkSrc0">
+        <inkml:traceFormat>
+          <inkml:channel name="X" type="integer" min="-2.14748E9" max="2.14748E9" units="cm"/>
+          <inkml:channel name="Y" type="integer" min="-2.14748E9" max="2.14748E9" units="cm"/>
+          <inkml:channel name="F" type="integer" max="32767" units="dev"/>
+        </inkml:traceFormat>
+        <inkml:channelProperties>
+          <inkml:channelProperty channel="X" name="resolution" value="1000" units="1/cm"/>
+          <inkml:channelProperty channel="Y" name="resolution" value="1000" units="1/cm"/>
+          <inkml:channelProperty channel="F" name="resolution" value="0" units="1/dev"/>
+        </inkml:channelProperties>
+      </inkml:inkSource>
+      <inkml:timestamp xml:id="ts0" timeString="2026-03-16T20:38:47.981"/>
+    </inkml:context>
+    <inkml:brush xml:id="br0">
+      <inkml:brushProperty name="width" value="0.05292" units="cm"/>
+      <inkml:brushProperty name="height" value="0.05292" units="cm"/>
+      <inkml:brushProperty name="color" value="#FF0000"/>
+    </inkml:brush>
+  </inkml:definitions>
+  <inkml:trace contextRef="#ctx0" brushRef="#br0">1601 6099 24575,'32'0'0,"-1"0"0,1 0 0,-2 0 0,1 0 0,2 0 0,0 0 0,-3 0 0,2 0 0,0 0 0,2 0 0,-1 0-547,0 0 1,0 0 0,1 0 0,0 0 0,1 0 0,-1 0-1,2 0 1,0 0 0,1 0 0,-1 0 0,1 0 0,0 0 92,-3 0 0,0 0 0,0 0 0,0 0 0,0 0 0,1 0 0,0 0 454,-3 0 0,1 0 0,0 0 0,0 0 0,0 0 0,0 0 0,0 0 0,0 0 0,4 0 0,-1 0 0,1 0 0,-1 0 0,0 0 0,0 0 0,0 0 0,-1 0 0,0 0 0,-1 0 0,0 0 0,0 0 0,0 0 0,0 0-21,3 0 0,-1 0 0,1 0 0,-1 0 0,-1 0 0,0 0 21,2 0 0,0 0 0,-2 0 0,1 0 0,-2 0-182,-2 0 0,-1 0 0,0 0 1,-1 0-1,-1 0 182,3 0 0,0 0 0,-1 0 0,-1 0 585,8 0 1,-2 0 0,0 0-586,-4 0 0,-1 0 0,0 0 0,2 0 0,0 0 0,0 0 0,1 0 0,1 0 0,0 0 0,-7 0 0,1 0 0,-1 0 0,0 0 0,9 0 0,-1 0 0,0 0 0,1 0 0,0 0 0,-1 0 0,-4 0 0,-2 0 0,1 0 0,0 0 0,-1 0 0,2 0 0,4-4 0,1 0 0,0 0 0,-5 3 0,0 1 0,1-2 0,-2-2 0,1-3 0,1 1 0,-1-1 768,4 0 1,0 0 0,1 1-769,-5 2 0,1 0 0,0 1 0,-1-2 0,-4-2 0,-1-2 0,0 1 0,0 2 0,3 4 0,1 2 0,0 0 0,-1-1 0,-1-1 0,-1-2 0,0 1 0,0 1 0,2 1 0,0 1 0,0 0 0,1 1 0,1-1 0,1 0 0,0 0 0,0 0 0,-3 0 0,-1 0 0,1 0 0,1 0 0,0 0 0,1 0 0,1 0 0,0 0 0,-2 0 109,6 0 0,-2 0 0,1 0 1,2 0-110,-8 0 0,1 0 0,1 0 0,0 0 0,0 0 0,-1 0-205,4 0 0,0 0 0,0 0 0,-1 0 0,1 0 205,-1-2 0,1-1 0,-1 0 0,1 1 0,0 0 0,1 1 0,1 0 0,0 1 0,-1 0 0,0-1-160,-3-1 0,0 0 0,-1 0 0,0-1 0,0 0 160,0 0 0,0-1 0,-1 0 0,1 0 0,0 1 0,-1 2 0,0 0 0,1 1 0,-1 0 0,0-2 0,4-2 0,1 0 0,-1-1 0,0 0 0,-2 2 0,1 0 0,-1 0 0,0 1 0,0 1 0,-1 0 0,0 1 0,1-1 0,-1-2 0,1 0 0,-1-1 0,2 2 0,0 1 0,1 1 0,0 1 0,2-1 0,-4 0 0,1 0 0,0 0 0,1 0 0,-1 0 0,1 0 0,-1 0 0,1 0 0,0 0 0,0 0 0,-1 0 0,1 0 0,0 0 0,0 0 0,-1 0 0,-2 0 0,1 0 0,-2 0 0,1 0 0,-1 0 0,4 0 0,0 0 0,-1 0 0,0 0 0,-3 0 0,-1 0 0,0 0 0,-2 0 221,3 0 0,-2 0 1,-1 0-222,1 0 0,-1 0 0,-2 0 993,-4 0 1,-2 0-994,7 0 0,-4 0 0,-7 0 0,2 0 0</inkml:trace>
 </inkml:ink>
 </file>
 
@@ -9010,6 +9461,57 @@
           </a:p>
         </p:txBody>
       </p:sp>
+      <mc:AlternateContent xmlns:mc="http://schemas.openxmlformats.org/markup-compatibility/2006">
+        <mc:Choice xmlns:p14="http://schemas.microsoft.com/office/powerpoint/2010/main" Requires="p14">
+          <p:contentPart p14:bwMode="auto" r:id="rId3">
+            <p14:nvContentPartPr>
+              <p14:cNvPr id="11" name="Ink 10">
+                <a:extLst>
+                  <a:ext uri="{FF2B5EF4-FFF2-40B4-BE49-F238E27FC236}">
+                    <a16:creationId xmlns:a16="http://schemas.microsoft.com/office/drawing/2014/main" id="{A5373A29-833A-76A7-E655-FBE89D3AAED8}"/>
+                  </a:ext>
+                </a:extLst>
+              </p14:cNvPr>
+              <p14:cNvContentPartPr/>
+              <p14:nvPr/>
+            </p14:nvContentPartPr>
+            <p14:xfrm>
+              <a:off x="247680" y="1085760"/>
+              <a:ext cx="5463000" cy="3672720"/>
+            </p14:xfrm>
+          </p:contentPart>
+        </mc:Choice>
+        <mc:Fallback>
+          <p:pic>
+            <p:nvPicPr>
+              <p:cNvPr id="11" name="Ink 10">
+                <a:extLst>
+                  <a:ext uri="{FF2B5EF4-FFF2-40B4-BE49-F238E27FC236}">
+                    <a16:creationId xmlns:a16="http://schemas.microsoft.com/office/drawing/2014/main" id="{A5373A29-833A-76A7-E655-FBE89D3AAED8}"/>
+                  </a:ext>
+                </a:extLst>
+              </p:cNvPr>
+              <p:cNvPicPr/>
+              <p:nvPr/>
+            </p:nvPicPr>
+            <p:blipFill>
+              <a:blip r:embed="rId4"/>
+              <a:stretch>
+                <a:fillRect/>
+              </a:stretch>
+            </p:blipFill>
+            <p:spPr>
+              <a:xfrm>
+                <a:off x="238320" y="1076400"/>
+                <a:ext cx="5481720" cy="3691440"/>
+              </a:xfrm>
+              <a:prstGeom prst="rect">
+                <a:avLst/>
+              </a:prstGeom>
+            </p:spPr>
+          </p:pic>
+        </mc:Fallback>
+      </mc:AlternateContent>
     </p:spTree>
   </p:cSld>
   <p:clrMapOvr>
@@ -10457,6 +10959,57 @@
           </a:p>
         </p:txBody>
       </p:sp>
+      <mc:AlternateContent xmlns:mc="http://schemas.openxmlformats.org/markup-compatibility/2006">
+        <mc:Choice xmlns:p14="http://schemas.microsoft.com/office/powerpoint/2010/main" Requires="p14">
+          <p:contentPart p14:bwMode="auto" r:id="rId3">
+            <p14:nvContentPartPr>
+              <p14:cNvPr id="9" name="Ink 8">
+                <a:extLst>
+                  <a:ext uri="{FF2B5EF4-FFF2-40B4-BE49-F238E27FC236}">
+                    <a16:creationId xmlns:a16="http://schemas.microsoft.com/office/drawing/2014/main" id="{C856A445-2227-D217-9C1A-2D97DDDFF05A}"/>
+                  </a:ext>
+                </a:extLst>
+              </p14:cNvPr>
+              <p14:cNvContentPartPr/>
+              <p14:nvPr/>
+            </p14:nvContentPartPr>
+            <p14:xfrm>
+              <a:off x="7115040" y="2752560"/>
+              <a:ext cx="591120" cy="360"/>
+            </p14:xfrm>
+          </p:contentPart>
+        </mc:Choice>
+        <mc:Fallback>
+          <p:pic>
+            <p:nvPicPr>
+              <p:cNvPr id="9" name="Ink 8">
+                <a:extLst>
+                  <a:ext uri="{FF2B5EF4-FFF2-40B4-BE49-F238E27FC236}">
+                    <a16:creationId xmlns:a16="http://schemas.microsoft.com/office/drawing/2014/main" id="{C856A445-2227-D217-9C1A-2D97DDDFF05A}"/>
+                  </a:ext>
+                </a:extLst>
+              </p:cNvPr>
+              <p:cNvPicPr/>
+              <p:nvPr/>
+            </p:nvPicPr>
+            <p:blipFill>
+              <a:blip r:embed="rId4"/>
+              <a:stretch>
+                <a:fillRect/>
+              </a:stretch>
+            </p:blipFill>
+            <p:spPr>
+              <a:xfrm>
+                <a:off x="7105680" y="2743200"/>
+                <a:ext cx="609840" cy="19080"/>
+              </a:xfrm>
+              <a:prstGeom prst="rect">
+                <a:avLst/>
+              </a:prstGeom>
+            </p:spPr>
+          </p:pic>
+        </mc:Fallback>
+      </mc:AlternateContent>
     </p:spTree>
     <p:extLst>
       <p:ext uri="{BB962C8B-B14F-4D97-AF65-F5344CB8AC3E}">
@@ -11526,6 +12079,57 @@
           </a:p>
         </p:txBody>
       </p:sp>
+      <mc:AlternateContent xmlns:mc="http://schemas.openxmlformats.org/markup-compatibility/2006">
+        <mc:Choice xmlns:p14="http://schemas.microsoft.com/office/powerpoint/2010/main" Requires="p14">
+          <p:contentPart p14:bwMode="auto" r:id="rId3">
+            <p14:nvContentPartPr>
+              <p14:cNvPr id="9" name="Ink 8">
+                <a:extLst>
+                  <a:ext uri="{FF2B5EF4-FFF2-40B4-BE49-F238E27FC236}">
+                    <a16:creationId xmlns:a16="http://schemas.microsoft.com/office/drawing/2014/main" id="{F6E23D20-ECB1-2128-49A5-833F5122B14F}"/>
+                  </a:ext>
+                </a:extLst>
+              </p14:cNvPr>
+              <p14:cNvContentPartPr/>
+              <p14:nvPr/>
+            </p14:nvContentPartPr>
+            <p14:xfrm>
+              <a:off x="1666800" y="3852720"/>
+              <a:ext cx="157680" cy="91080"/>
+            </p14:xfrm>
+          </p:contentPart>
+        </mc:Choice>
+        <mc:Fallback>
+          <p:pic>
+            <p:nvPicPr>
+              <p:cNvPr id="9" name="Ink 8">
+                <a:extLst>
+                  <a:ext uri="{FF2B5EF4-FFF2-40B4-BE49-F238E27FC236}">
+                    <a16:creationId xmlns:a16="http://schemas.microsoft.com/office/drawing/2014/main" id="{F6E23D20-ECB1-2128-49A5-833F5122B14F}"/>
+                  </a:ext>
+                </a:extLst>
+              </p:cNvPr>
+              <p:cNvPicPr/>
+              <p:nvPr/>
+            </p:nvPicPr>
+            <p:blipFill>
+              <a:blip r:embed="rId4"/>
+              <a:stretch>
+                <a:fillRect/>
+              </a:stretch>
+            </p:blipFill>
+            <p:spPr>
+              <a:xfrm>
+                <a:off x="1657440" y="3843360"/>
+                <a:ext cx="176400" cy="109800"/>
+              </a:xfrm>
+              <a:prstGeom prst="rect">
+                <a:avLst/>
+              </a:prstGeom>
+            </p:spPr>
+          </p:pic>
+        </mc:Fallback>
+      </mc:AlternateContent>
     </p:spTree>
     <p:extLst>
       <p:ext uri="{BB962C8B-B14F-4D97-AF65-F5344CB8AC3E}">
@@ -12933,6 +13537,57 @@
           </p:txBody>
         </p:sp>
       </p:grpSp>
+      <mc:AlternateContent xmlns:mc="http://schemas.openxmlformats.org/markup-compatibility/2006">
+        <mc:Choice xmlns:p14="http://schemas.microsoft.com/office/powerpoint/2010/main" Requires="p14">
+          <p:contentPart p14:bwMode="auto" r:id="rId3">
+            <p14:nvContentPartPr>
+              <p14:cNvPr id="9" name="Ink 8">
+                <a:extLst>
+                  <a:ext uri="{FF2B5EF4-FFF2-40B4-BE49-F238E27FC236}">
+                    <a16:creationId xmlns:a16="http://schemas.microsoft.com/office/drawing/2014/main" id="{6A8326B1-5B8F-3BA2-58EF-CEA1DAB9A61B}"/>
+                  </a:ext>
+                </a:extLst>
+              </p14:cNvPr>
+              <p14:cNvContentPartPr/>
+              <p14:nvPr/>
+            </p14:nvContentPartPr>
+            <p14:xfrm>
+              <a:off x="576360" y="2118960"/>
+              <a:ext cx="2914920" cy="77040"/>
+            </p14:xfrm>
+          </p:contentPart>
+        </mc:Choice>
+        <mc:Fallback>
+          <p:pic>
+            <p:nvPicPr>
+              <p:cNvPr id="9" name="Ink 8">
+                <a:extLst>
+                  <a:ext uri="{FF2B5EF4-FFF2-40B4-BE49-F238E27FC236}">
+                    <a16:creationId xmlns:a16="http://schemas.microsoft.com/office/drawing/2014/main" id="{6A8326B1-5B8F-3BA2-58EF-CEA1DAB9A61B}"/>
+                  </a:ext>
+                </a:extLst>
+              </p:cNvPr>
+              <p:cNvPicPr/>
+              <p:nvPr/>
+            </p:nvPicPr>
+            <p:blipFill>
+              <a:blip r:embed="rId4"/>
+              <a:stretch>
+                <a:fillRect/>
+              </a:stretch>
+            </p:blipFill>
+            <p:spPr>
+              <a:xfrm>
+                <a:off x="567000" y="2109600"/>
+                <a:ext cx="2933640" cy="95760"/>
+              </a:xfrm>
+              <a:prstGeom prst="rect">
+                <a:avLst/>
+              </a:prstGeom>
+            </p:spPr>
+          </p:pic>
+        </mc:Fallback>
+      </mc:AlternateContent>
     </p:spTree>
     <p:extLst>
       <p:ext uri="{BB962C8B-B14F-4D97-AF65-F5344CB8AC3E}">
@@ -13834,6 +14489,57 @@
           </a:p>
         </p:txBody>
       </p:sp>
+      <mc:AlternateContent xmlns:mc="http://schemas.openxmlformats.org/markup-compatibility/2006">
+        <mc:Choice xmlns:p14="http://schemas.microsoft.com/office/powerpoint/2010/main" Requires="p14">
+          <p:contentPart p14:bwMode="auto" r:id="rId3">
+            <p14:nvContentPartPr>
+              <p14:cNvPr id="8" name="Ink 7">
+                <a:extLst>
+                  <a:ext uri="{FF2B5EF4-FFF2-40B4-BE49-F238E27FC236}">
+                    <a16:creationId xmlns:a16="http://schemas.microsoft.com/office/drawing/2014/main" id="{0C6BB417-5F54-BB94-4647-99258EA55782}"/>
+                  </a:ext>
+                </a:extLst>
+              </p14:cNvPr>
+              <p14:cNvContentPartPr/>
+              <p14:nvPr/>
+            </p14:nvContentPartPr>
+            <p14:xfrm>
+              <a:off x="838080" y="1314360"/>
+              <a:ext cx="1749960" cy="462240"/>
+            </p14:xfrm>
+          </p:contentPart>
+        </mc:Choice>
+        <mc:Fallback>
+          <p:pic>
+            <p:nvPicPr>
+              <p:cNvPr id="8" name="Ink 7">
+                <a:extLst>
+                  <a:ext uri="{FF2B5EF4-FFF2-40B4-BE49-F238E27FC236}">
+                    <a16:creationId xmlns:a16="http://schemas.microsoft.com/office/drawing/2014/main" id="{0C6BB417-5F54-BB94-4647-99258EA55782}"/>
+                  </a:ext>
+                </a:extLst>
+              </p:cNvPr>
+              <p:cNvPicPr/>
+              <p:nvPr/>
+            </p:nvPicPr>
+            <p:blipFill>
+              <a:blip r:embed="rId4"/>
+              <a:stretch>
+                <a:fillRect/>
+              </a:stretch>
+            </p:blipFill>
+            <p:spPr>
+              <a:xfrm>
+                <a:off x="828720" y="1305000"/>
+                <a:ext cx="1768680" cy="480960"/>
+              </a:xfrm>
+              <a:prstGeom prst="rect">
+                <a:avLst/>
+              </a:prstGeom>
+            </p:spPr>
+          </p:pic>
+        </mc:Fallback>
+      </mc:AlternateContent>
     </p:spTree>
   </p:cSld>
   <p:clrMapOvr>
@@ -14414,6 +15120,57 @@
           </a:p>
         </p:txBody>
       </p:sp>
+      <mc:AlternateContent xmlns:mc="http://schemas.openxmlformats.org/markup-compatibility/2006">
+        <mc:Choice xmlns:p14="http://schemas.microsoft.com/office/powerpoint/2010/main" Requires="p14">
+          <p:contentPart p14:bwMode="auto" r:id="rId3">
+            <p14:nvContentPartPr>
+              <p14:cNvPr id="9" name="Ink 8">
+                <a:extLst>
+                  <a:ext uri="{FF2B5EF4-FFF2-40B4-BE49-F238E27FC236}">
+                    <a16:creationId xmlns:a16="http://schemas.microsoft.com/office/drawing/2014/main" id="{FE68BED0-E6D1-4877-BA95-401FD50FDD53}"/>
+                  </a:ext>
+                </a:extLst>
+              </p14:cNvPr>
+              <p14:cNvContentPartPr/>
+              <p14:nvPr/>
+            </p14:nvContentPartPr>
+            <p14:xfrm>
+              <a:off x="2381400" y="1666800"/>
+              <a:ext cx="438480" cy="34200"/>
+            </p14:xfrm>
+          </p:contentPart>
+        </mc:Choice>
+        <mc:Fallback>
+          <p:pic>
+            <p:nvPicPr>
+              <p:cNvPr id="9" name="Ink 8">
+                <a:extLst>
+                  <a:ext uri="{FF2B5EF4-FFF2-40B4-BE49-F238E27FC236}">
+                    <a16:creationId xmlns:a16="http://schemas.microsoft.com/office/drawing/2014/main" id="{FE68BED0-E6D1-4877-BA95-401FD50FDD53}"/>
+                  </a:ext>
+                </a:extLst>
+              </p:cNvPr>
+              <p:cNvPicPr/>
+              <p:nvPr/>
+            </p:nvPicPr>
+            <p:blipFill>
+              <a:blip r:embed="rId4"/>
+              <a:stretch>
+                <a:fillRect/>
+              </a:stretch>
+            </p:blipFill>
+            <p:spPr>
+              <a:xfrm>
+                <a:off x="2372040" y="1657440"/>
+                <a:ext cx="457200" cy="52920"/>
+              </a:xfrm>
+              <a:prstGeom prst="rect">
+                <a:avLst/>
+              </a:prstGeom>
+            </p:spPr>
+          </p:pic>
+        </mc:Fallback>
+      </mc:AlternateContent>
     </p:spTree>
   </p:cSld>
   <p:clrMapOvr>
@@ -17118,6 +17875,57 @@
           </a:p>
         </p:txBody>
       </p:sp>
+      <mc:AlternateContent xmlns:mc="http://schemas.openxmlformats.org/markup-compatibility/2006">
+        <mc:Choice xmlns:p14="http://schemas.microsoft.com/office/powerpoint/2010/main" Requires="p14">
+          <p:contentPart p14:bwMode="auto" r:id="rId3">
+            <p14:nvContentPartPr>
+              <p14:cNvPr id="9" name="Ink 8">
+                <a:extLst>
+                  <a:ext uri="{FF2B5EF4-FFF2-40B4-BE49-F238E27FC236}">
+                    <a16:creationId xmlns:a16="http://schemas.microsoft.com/office/drawing/2014/main" id="{BB68B7B7-4105-B91D-BEA7-B242F11B39E9}"/>
+                  </a:ext>
+                </a:extLst>
+              </p14:cNvPr>
+              <p14:cNvContentPartPr/>
+              <p14:nvPr/>
+            </p14:nvContentPartPr>
+            <p14:xfrm>
+              <a:off x="7829640" y="2333520"/>
+              <a:ext cx="466920" cy="33840"/>
+            </p14:xfrm>
+          </p:contentPart>
+        </mc:Choice>
+        <mc:Fallback>
+          <p:pic>
+            <p:nvPicPr>
+              <p:cNvPr id="9" name="Ink 8">
+                <a:extLst>
+                  <a:ext uri="{FF2B5EF4-FFF2-40B4-BE49-F238E27FC236}">
+                    <a16:creationId xmlns:a16="http://schemas.microsoft.com/office/drawing/2014/main" id="{BB68B7B7-4105-B91D-BEA7-B242F11B39E9}"/>
+                  </a:ext>
+                </a:extLst>
+              </p:cNvPr>
+              <p:cNvPicPr/>
+              <p:nvPr/>
+            </p:nvPicPr>
+            <p:blipFill>
+              <a:blip r:embed="rId4"/>
+              <a:stretch>
+                <a:fillRect/>
+              </a:stretch>
+            </p:blipFill>
+            <p:spPr>
+              <a:xfrm>
+                <a:off x="7820280" y="2324160"/>
+                <a:ext cx="485640" cy="52560"/>
+              </a:xfrm>
+              <a:prstGeom prst="rect">
+                <a:avLst/>
+              </a:prstGeom>
+            </p:spPr>
+          </p:pic>
+        </mc:Fallback>
+      </mc:AlternateContent>
     </p:spTree>
     <p:extLst>
       <p:ext uri="{BB962C8B-B14F-4D97-AF65-F5344CB8AC3E}">
@@ -20775,6 +21583,57 @@
           </a:fontRef>
         </p:style>
       </p:cxnSp>
+      <mc:AlternateContent xmlns:mc="http://schemas.openxmlformats.org/markup-compatibility/2006">
+        <mc:Choice xmlns:p14="http://schemas.microsoft.com/office/powerpoint/2010/main" Requires="p14">
+          <p:contentPart p14:bwMode="auto" r:id="rId3">
+            <p14:nvContentPartPr>
+              <p14:cNvPr id="9" name="Ink 8">
+                <a:extLst>
+                  <a:ext uri="{FF2B5EF4-FFF2-40B4-BE49-F238E27FC236}">
+                    <a16:creationId xmlns:a16="http://schemas.microsoft.com/office/drawing/2014/main" id="{8FC38E98-D14D-6B04-2CE0-2C245D9D3A0A}"/>
+                  </a:ext>
+                </a:extLst>
+              </p14:cNvPr>
+              <p14:cNvContentPartPr/>
+              <p14:nvPr/>
+            </p14:nvContentPartPr>
+            <p14:xfrm>
+              <a:off x="4133880" y="3819600"/>
+              <a:ext cx="4215240" cy="938880"/>
+            </p14:xfrm>
+          </p:contentPart>
+        </mc:Choice>
+        <mc:Fallback>
+          <p:pic>
+            <p:nvPicPr>
+              <p:cNvPr id="9" name="Ink 8">
+                <a:extLst>
+                  <a:ext uri="{FF2B5EF4-FFF2-40B4-BE49-F238E27FC236}">
+                    <a16:creationId xmlns:a16="http://schemas.microsoft.com/office/drawing/2014/main" id="{8FC38E98-D14D-6B04-2CE0-2C245D9D3A0A}"/>
+                  </a:ext>
+                </a:extLst>
+              </p:cNvPr>
+              <p:cNvPicPr/>
+              <p:nvPr/>
+            </p:nvPicPr>
+            <p:blipFill>
+              <a:blip r:embed="rId4"/>
+              <a:stretch>
+                <a:fillRect/>
+              </a:stretch>
+            </p:blipFill>
+            <p:spPr>
+              <a:xfrm>
+                <a:off x="4124520" y="3810240"/>
+                <a:ext cx="4233960" cy="957600"/>
+              </a:xfrm>
+              <a:prstGeom prst="rect">
+                <a:avLst/>
+              </a:prstGeom>
+            </p:spPr>
+          </p:pic>
+        </mc:Fallback>
+      </mc:AlternateContent>
     </p:spTree>
     <p:extLst>
       <p:ext uri="{BB962C8B-B14F-4D97-AF65-F5344CB8AC3E}">
@@ -23793,6 +24652,57 @@
           </a:p>
         </p:txBody>
       </p:sp>
+      <mc:AlternateContent xmlns:mc="http://schemas.openxmlformats.org/markup-compatibility/2006">
+        <mc:Choice xmlns:p14="http://schemas.microsoft.com/office/powerpoint/2010/main" Requires="p14">
+          <p:contentPart p14:bwMode="auto" r:id="rId3">
+            <p14:nvContentPartPr>
+              <p14:cNvPr id="9" name="Ink 8">
+                <a:extLst>
+                  <a:ext uri="{FF2B5EF4-FFF2-40B4-BE49-F238E27FC236}">
+                    <a16:creationId xmlns:a16="http://schemas.microsoft.com/office/drawing/2014/main" id="{2DCDDDCE-FADF-5FCD-B74E-A46C5BFBFC91}"/>
+                  </a:ext>
+                </a:extLst>
+              </p14:cNvPr>
+              <p14:cNvContentPartPr/>
+              <p14:nvPr/>
+            </p14:nvContentPartPr>
+            <p14:xfrm>
+              <a:off x="6653160" y="2266920"/>
+              <a:ext cx="1595880" cy="124200"/>
+            </p14:xfrm>
+          </p:contentPart>
+        </mc:Choice>
+        <mc:Fallback>
+          <p:pic>
+            <p:nvPicPr>
+              <p:cNvPr id="9" name="Ink 8">
+                <a:extLst>
+                  <a:ext uri="{FF2B5EF4-FFF2-40B4-BE49-F238E27FC236}">
+                    <a16:creationId xmlns:a16="http://schemas.microsoft.com/office/drawing/2014/main" id="{2DCDDDCE-FADF-5FCD-B74E-A46C5BFBFC91}"/>
+                  </a:ext>
+                </a:extLst>
+              </p:cNvPr>
+              <p:cNvPicPr/>
+              <p:nvPr/>
+            </p:nvPicPr>
+            <p:blipFill>
+              <a:blip r:embed="rId4"/>
+              <a:stretch>
+                <a:fillRect/>
+              </a:stretch>
+            </p:blipFill>
+            <p:spPr>
+              <a:xfrm>
+                <a:off x="6643800" y="2257560"/>
+                <a:ext cx="1614600" cy="142920"/>
+              </a:xfrm>
+              <a:prstGeom prst="rect">
+                <a:avLst/>
+              </a:prstGeom>
+            </p:spPr>
+          </p:pic>
+        </mc:Fallback>
+      </mc:AlternateContent>
     </p:spTree>
     <p:extLst>
       <p:ext uri="{BB962C8B-B14F-4D97-AF65-F5344CB8AC3E}">
@@ -25338,10 +26248,10 @@
                 <a:ea typeface="Consolas" pitchFamily="34" charset="-122"/>
                 <a:cs typeface="Consolas" pitchFamily="34" charset="-120"/>
               </a:rPr>
-              <a:t> the sentinel value, so 7 </a:t>
-            </a:r>
-            <a:r>
-              <a:rPr lang="en-US" sz="1200" b="1" dirty="0">
+              <a:t> the sentinel value, </a:t>
+            </a:r>
+            <a:r>
+              <a:rPr lang="en-US" sz="1200">
                 <a:solidFill>
                   <a:srgbClr val="92400E"/>
                 </a:solidFill>
@@ -25349,10 +26259,10 @@
                 <a:ea typeface="Consolas" pitchFamily="34" charset="-122"/>
                 <a:cs typeface="Consolas" pitchFamily="34" charset="-120"/>
               </a:rPr>
-              <a:t>is</a:t>
-            </a:r>
-            <a:r>
-              <a:rPr lang="en-US" sz="1200" dirty="0">
+              <a:t>so 2 </a:t>
+            </a:r>
+            <a:r>
+              <a:rPr lang="en-US" sz="1200" b="1" dirty="0">
                 <a:solidFill>
                   <a:srgbClr val="92400E"/>
                 </a:solidFill>
@@ -25360,12 +26270,74 @@
                 <a:ea typeface="Consolas" pitchFamily="34" charset="-122"/>
                 <a:cs typeface="Consolas" pitchFamily="34" charset="-120"/>
               </a:rPr>
+              <a:t>is</a:t>
+            </a:r>
+            <a:r>
+              <a:rPr lang="en-US" sz="1200" dirty="0">
+                <a:solidFill>
+                  <a:srgbClr val="92400E"/>
+                </a:solidFill>
+                <a:latin typeface="Consolas" pitchFamily="34" charset="0"/>
+                <a:ea typeface="Consolas" pitchFamily="34" charset="-122"/>
+                <a:cs typeface="Consolas" pitchFamily="34" charset="-120"/>
+              </a:rPr>
               <a:t> in the vector</a:t>
             </a:r>
             <a:endParaRPr lang="en-US" sz="1200" dirty="0"/>
           </a:p>
         </p:txBody>
       </p:sp>
+      <mc:AlternateContent xmlns:mc="http://schemas.openxmlformats.org/markup-compatibility/2006">
+        <mc:Choice xmlns:p14="http://schemas.microsoft.com/office/powerpoint/2010/main" Requires="p14">
+          <p:contentPart p14:bwMode="auto" r:id="rId3">
+            <p14:nvContentPartPr>
+              <p14:cNvPr id="9" name="Ink 8">
+                <a:extLst>
+                  <a:ext uri="{FF2B5EF4-FFF2-40B4-BE49-F238E27FC236}">
+                    <a16:creationId xmlns:a16="http://schemas.microsoft.com/office/drawing/2014/main" id="{985AC7F8-7969-D1B8-1E81-EF25063C0B3C}"/>
+                  </a:ext>
+                </a:extLst>
+              </p14:cNvPr>
+              <p14:cNvContentPartPr/>
+              <p14:nvPr/>
+            </p14:nvContentPartPr>
+            <p14:xfrm>
+              <a:off x="6572160" y="2324160"/>
+              <a:ext cx="443520" cy="360"/>
+            </p14:xfrm>
+          </p:contentPart>
+        </mc:Choice>
+        <mc:Fallback>
+          <p:pic>
+            <p:nvPicPr>
+              <p:cNvPr id="9" name="Ink 8">
+                <a:extLst>
+                  <a:ext uri="{FF2B5EF4-FFF2-40B4-BE49-F238E27FC236}">
+                    <a16:creationId xmlns:a16="http://schemas.microsoft.com/office/drawing/2014/main" id="{985AC7F8-7969-D1B8-1E81-EF25063C0B3C}"/>
+                  </a:ext>
+                </a:extLst>
+              </p:cNvPr>
+              <p:cNvPicPr/>
+              <p:nvPr/>
+            </p:nvPicPr>
+            <p:blipFill>
+              <a:blip r:embed="rId4"/>
+              <a:stretch>
+                <a:fillRect/>
+              </a:stretch>
+            </p:blipFill>
+            <p:spPr>
+              <a:xfrm>
+                <a:off x="6562800" y="2314800"/>
+                <a:ext cx="462240" cy="19080"/>
+              </a:xfrm>
+              <a:prstGeom prst="rect">
+                <a:avLst/>
+              </a:prstGeom>
+            </p:spPr>
+          </p:pic>
+        </mc:Fallback>
+      </mc:AlternateContent>
     </p:spTree>
     <p:extLst>
       <p:ext uri="{BB962C8B-B14F-4D97-AF65-F5344CB8AC3E}">
